--- a/assets/pptx/catalog-70.pptx
+++ b/assets/pptx/catalog-70.pptx
@@ -3266,7 +3266,7 @@
                 <a:ea typeface="Ebrima"/>
                 <a:cs typeface="Ebrima"/>
               </a:rPr>
-              <a:t>እግዚአብሔር ይሄ ነው እኔን የታደገው አሃ አሃ (2x)</a:t>
+              <a:t>እግዚአብሔር ይሄ ነው እኔን የታደገው አሃ አሃ 2x</a:t>
             </a:r>
           </a:p>
         </p:txBody>
@@ -3876,7 +3876,7 @@
                 <a:ea typeface="Ebrima"/>
                 <a:cs typeface="Ebrima"/>
               </a:rPr>
-              <a:t>ይሆናል (3x) ያለው ኦሆ ኦሆ</a:t>
+              <a:t>ይሆናል 3x ያለው ኦሆ ኦሆ</a:t>
             </a:r>
           </a:p>
           <a:p>
@@ -4401,7 +4401,7 @@
                 <a:ea typeface="Ebrima"/>
                 <a:cs typeface="Ebrima"/>
               </a:rPr>
-              <a:t>ምኖርለት አሃ አሃ (2x)</a:t>
+              <a:t>ምኖርለት አሃ አሃ 2x</a:t>
             </a:r>
           </a:p>
         </p:txBody>
